--- a/bioinformatics_day2_PM.pptx
+++ b/bioinformatics_day2_PM.pptx
@@ -1857,7 +1857,29 @@
                 <a:ea typeface="Meiryo UI" panose="020B0604030504040204" pitchFamily="50" charset="-128"/>
                 <a:cs typeface="Yu Gothic" pitchFamily="34" charset="-120"/>
               </a:rPr>
-              <a:t>使用Notebook：bioinformatics_2-4.ipynb</a:t>
+              <a:t>使用Notebook：bioinformatics_</a:t>
+            </a:r>
+            <a:r>
+              <a:rPr lang="en-US" sz="1700">
+                <a:solidFill>
+                  <a:srgbClr val="F6FAFF"/>
+                </a:solidFill>
+                <a:latin typeface="Meiryo UI" panose="020B0604030504040204" pitchFamily="50" charset="-128"/>
+                <a:ea typeface="Meiryo UI" panose="020B0604030504040204" pitchFamily="50" charset="-128"/>
+                <a:cs typeface="Yu Gothic" pitchFamily="34" charset="-120"/>
+              </a:rPr>
+              <a:t>2-PM_1.</a:t>
+            </a:r>
+            <a:r>
+              <a:rPr lang="en-US" sz="1700" dirty="0">
+                <a:solidFill>
+                  <a:srgbClr val="F6FAFF"/>
+                </a:solidFill>
+                <a:latin typeface="Meiryo UI" panose="020B0604030504040204" pitchFamily="50" charset="-128"/>
+                <a:ea typeface="Meiryo UI" panose="020B0604030504040204" pitchFamily="50" charset="-128"/>
+                <a:cs typeface="Yu Gothic" pitchFamily="34" charset="-120"/>
+              </a:rPr>
+              <a:t>ipynb</a:t>
             </a:r>
             <a:endParaRPr lang="en-US" sz="1700" dirty="0">
               <a:latin typeface="Meiryo UI" panose="020B0604030504040204" pitchFamily="50" charset="-128"/>
@@ -3182,7 +3204,7 @@
                 <a:ea typeface="Meiryo UI" panose="020B0604030504040204" pitchFamily="50" charset="-128"/>
                 <a:cs typeface="Yu Gothic" pitchFamily="34" charset="-120"/>
               </a:rPr>
-              <a:t>bioinformatics_2-4.ipynb</a:t>
+              <a:t>bioinformatics_2-PM_1.ipynb</a:t>
             </a:r>
             <a:endParaRPr lang="en-US" sz="1600" dirty="0">
               <a:latin typeface="Meiryo UI" panose="020B0604030504040204" pitchFamily="50" charset="-128"/>
